--- a/lectures/Lecture 2.2 - Databases.pptx
+++ b/lectures/Lecture 2.2 - Databases.pptx
@@ -858,7 +858,7 @@
             </a:pPr>
             <a:r>
               <a:rPr lang="en-US"/>
-              <a:t>Last lecture we hit the wall with files-as-storage and listed five specific problems. Today: how databases solve all five. The cool part is that a SQLite database is also just a file on disk - the magic is in the layout and a few protocols around it, not in any kind of magic.</a:t>
+              <a:t>Last lecture we hit the wall with files-as-storage and listed five specific problems. Today: how databases solve all five. The cool part is that a SQLite database is also just a file sitting on disk, and everything that makes it different lives in the layout inside that file plus a few protocols around it.</a:t>
             </a:r>
             <a:endParaRPr/>
           </a:p>
@@ -1016,7 +1016,7 @@
             </a:pPr>
             <a:r>
               <a:rPr lang="en-US"/>
-              <a:t>sqlite_master is a real table you can query with SELECT - try it on their chat.db at the end of the lecture if there's time. The point: the schema isn't a separate config file, it's data inside the same DB. Self-describing systems are a big deal in computer science.</a:t>
+              <a:t>sqlite_master is a real table you can SELECT from - worth trying on their chat.db at the end if there's time. And the schema isn't off in some separate config file, it's data living inside the same database as everything else. Self-describing systems are a big deal in computer science and this is a nice small one to point at.</a:t>
             </a:r>
             <a:endParaRPr/>
           </a:p>
@@ -1332,7 +1332,7 @@
             </a:pPr>
             <a:r>
               <a:rPr lang="en-US"/>
-              <a:t>The cool insight here: SQLite didn't invent concurrency control. It leans on a primitive (file locks) that's existed in Unix since the 1980s. The composition is what's clever, not the parts.</a:t>
+              <a:t>The cool bit here is that SQLite didn't invent concurrency control at all - it leans on file locks, a primitive that's been sitting in Unix since the 1980s. The cleverness is all in the composition.</a:t>
             </a:r>
             <a:endParaRPr/>
           </a:p>
@@ -1490,7 +1490,7 @@
             </a:pPr>
             <a:r>
               <a:rPr lang="en-US"/>
-              <a:t>This is the emotional payload of the lecture. Slow down here. The students should walk away with the feeling that databases are not magic - they're a stack of small, understandable engineering tricks on top of the same files we used last week.</a:t>
+              <a:t>This is the one I actually care about them feeling, so slow down here. What they should walk out with is that a database is a stack of small understandable engineering tricks piled on top of the same files we were using last week, with no magic anywhere in it.</a:t>
             </a:r>
             <a:endParaRPr/>
           </a:p>
@@ -1964,7 +1964,7 @@
             </a:pPr>
             <a:r>
               <a:rPr lang="en-US"/>
-              <a:t>Declarative vs imperative is the conceptual leap. Everything they've written so far is imperative: step-by-step instructions. SQL flips it: you describe the answer and the database figures out how to get there. This is the same idea that powers Excel formulas, Prolog, and a lot of modern reactive UI frameworks.</a:t>
+              <a:t>Declarative vs imperative is the conceptual leap here. Everything they've written up to now has been step-by-step instructions, and SQL flips that around so you describe what the answer looks like and the database goes and works out how to get it. Same idea underneath Excel formulas, Prolog, and a lot of the reactive UI stuff they'll meet in week 6.</a:t>
             </a:r>
             <a:endParaRPr/>
           </a:p>
@@ -2122,7 +2122,7 @@
             </a:pPr>
             <a:r>
               <a:rPr lang="en-US"/>
-              <a:t>Declarative vs imperative is the conceptual leap. Everything they've written so far is imperative: step-by-step instructions. SQL flips it: you describe the answer and the database figures out how to get there. This is the same idea that powers Excel formulas, Prolog, and a lot of modern reactive UI frameworks.</a:t>
+              <a:t>Declarative vs imperative is the conceptual leap here. Everything they've written up to now has been step-by-step instructions, and SQL flips that around so you describe what the answer looks like and the database goes and works out how to get it. Same idea underneath Excel formulas, Prolog, and a lot of the reactive UI stuff they'll meet in week 6.</a:t>
             </a:r>
             <a:endParaRPr/>
           </a:p>
@@ -3860,7 +3860,7 @@
             </a:pPr>
             <a:r>
               <a:rPr lang="en-US"/>
-              <a:t>The key patterns: 'SQL' for queries without parameters, 'SQL with ?', (tuple,) for queries with parameters. .fetchone()[0] is the idiom for single-value results (COUNT, SUM, MAX).</a:t>
+              <a:t>Two patterns to hold onto: plain 'SQL' when there are no parameters, and 'SQL with ?' plus a (tuple,) when there are. And .fetchone()[0] is the idiom when you want a single scalar back - COUNT, SUM, MAX.</a:t>
             </a:r>
             <a:endParaRPr/>
           </a:p>
@@ -4176,7 +4176,7 @@
             </a:pPr>
             <a:r>
               <a:rPr lang="en-US"/>
-              <a:t>SQL injection is one of the most common web vulnerabilities (OWASP Top 10). The fix is simple: never put user input directly in SQL strings. Always use :param placeholders and pass values in a dict. This applies to ALL SQL, not just SELECT.</a:t>
+              <a:t>SQL injection is one of the most common web vulnerabilities out there and it's been on the OWASP Top 10 essentially forever. The fix is boring: never put user input into a SQL string, use :param placeholders and hand the values over in a dict. And it's ALL SQL, not only the SELECTs.</a:t>
             </a:r>
             <a:endParaRPr/>
           </a:p>
@@ -4492,7 +4492,7 @@
             </a:pPr>
             <a:r>
               <a:rPr lang="en-US"/>
-              <a:t>SQL injection is one of the most common web vulnerabilities (OWASP Top 10). The fix is simple: never put user input directly in SQL strings. Always use :param placeholders and pass values in a dict. This applies to ALL SQL, not just SELECT.</a:t>
+              <a:t>SQL injection is one of the most common web vulnerabilities out there and it's been on the OWASP Top 10 essentially forever. The fix is boring: never put user input into a SQL string, use :param placeholders and hand the values over in a dict. And it's ALL SQL, not only the SELECTs.</a:t>
             </a:r>
             <a:endParaRPr/>
           </a:p>
@@ -4650,7 +4650,7 @@
             </a:pPr>
             <a:r>
               <a:rPr lang="en-US"/>
-              <a:t>SQL injection is one of the most common web vulnerabilities (OWASP Top 10). The fix is simple: never put user input directly in SQL strings. Always use :param placeholders and pass values in a dict. This applies to ALL SQL, not just SELECT.</a:t>
+              <a:t>SQL injection is one of the most common web vulnerabilities out there and it's been on the OWASP Top 10 essentially forever. The fix is boring: never put user input into a SQL string, use :param placeholders and hand the values over in a dict. And it's ALL SQL, not only the SELECTs.</a:t>
             </a:r>
             <a:endParaRPr/>
           </a:p>
@@ -4808,7 +4808,7 @@
             </a:pPr>
             <a:r>
               <a:rPr lang="en-US"/>
-              <a:t>SQL injection is one of the most common web vulnerabilities (OWASP Top 10). The fix is simple: never put user input directly in SQL strings. Always use ? placeholders and pass values in a tuple. This applies to ALL SQL, not just SELECT. Same rule in every language and every database driver - the placeholder syntax varies (? in sqlite3, %s in psycopg, :name in cx_Oracle) but the principle is identical.</a:t>
+              <a:t>SQL injection is one of the most common web vulnerabilities out there and it's been on the OWASP Top 10 essentially forever. The fix is boring: never put user input into a SQL string, use ? placeholders and hand the values over in a tuple. And it's ALL SQL, not only the SELECTs. Same rule in every language and every driver too - the placeholder syntax moves around (? in sqlite3, %s in psycopg, :name in cx_Oracle) but the principle doesn't.</a:t>
             </a:r>
             <a:endParaRPr/>
           </a:p>
@@ -4966,7 +4966,7 @@
             </a:pPr>
             <a:r>
               <a:rPr lang="en-US"/>
-              <a:t>This is the design-judgment section. The full theory of normalization (1NF/2NF/3NF) gets its own lecture later in the course. Today: just the three shapes a table can take and the intuition for when to use each. The question slide is the hook.</a:t>
+              <a:t>Design-judgment section. The full normalization theory (1NF/2NF/3NF) gets its own lecture later on, so today is just the three shapes a table can take plus some intuition about when you'd reach for each one. The question slide is the hook, so let them sit with it a second.</a:t>
             </a:r>
             <a:endParaRPr/>
           </a:p>
@@ -5756,7 +5756,7 @@
             </a:pPr>
             <a:r>
               <a:rPr lang="en-US"/>
-              <a:t>This is judgment, not rules. The right answer depends on access patterns, growth, and how often the schema needs to change. The point of this section is that the question itself exists - most students have never been asked to design a table before, they've only used ones that already existed.</a:t>
+              <a:t>This is judgment rather than rules, and the right answer moves around depending on access patterns, growth, and how often the schema has to change. What I mostly want out of the section is that they learn the question exists at all - most of them have never been asked to design a table, they've only ever used tables somebody else already made.</a:t>
             </a:r>
             <a:endParaRPr/>
           </a:p>
@@ -5914,7 +5914,7 @@
             </a:pPr>
             <a:r>
               <a:rPr lang="en-US"/>
-              <a:t>This is judgment, not rules. The right answer depends on access patterns, growth, and how often the schema needs to change. The point of this section is that the question itself exists - most students have never been asked to design a table before, they've only used ones that already existed.</a:t>
+              <a:t>This is judgment rather than rules, and the right answer moves around depending on access patterns, growth, and how often the schema has to change. What I mostly want out of the section is that they learn the question exists at all - most of them have never been asked to design a table, they've only ever used tables somebody else already made.</a:t>
             </a:r>
             <a:endParaRPr/>
           </a:p>
@@ -6230,7 +6230,7 @@
             </a:pPr>
             <a:r>
               <a:rPr lang="en-US"/>
-              <a:t>This is judgment, not rules. The right answer depends on access patterns, growth, and how often the schema needs to change. The point of this section is that the question itself exists - most students have never been asked to design a table before, they've only used ones that already existed.</a:t>
+              <a:t>This is judgment rather than rules, and the right answer moves around depending on access patterns, growth, and how often the schema has to change. What I mostly want out of the section is that they learn the question exists at all - most of them have never been asked to design a table, they've only ever used tables somebody else already made.</a:t>
             </a:r>
             <a:endParaRPr/>
           </a:p>
@@ -7178,7 +7178,7 @@
             </a:pPr>
             <a:r>
               <a:rPr lang="en-US"/>
-              <a:t>The headline number is the one that should stick: 20 hops vs 1 million reads. That's the difference between 'instant' and 'your server hangs.' The next slide shows the picture.</a:t>
+              <a:t>The number is what should stick - 20 hops against a million reads, which is the difference between instant and your server sitting there while somebody refreshes. Picture on the next slide.</a:t>
             </a:r>
             <a:endParaRPr/>
           </a:p>

--- a/lectures/Lecture 2.2 - Databases.pptx
+++ b/lectures/Lecture 2.2 - Databases.pptx
@@ -846,22 +846,7 @@
             <a:noAutofit/>
           </a:bodyPr>
           <a:lstStyle/>
-          <a:p>
-            <a:pPr marL="0" lvl="0" indent="0" algn="l" rtl="0">
-              <a:spcBef>
-                <a:spcPts val="0"/>
-              </a:spcBef>
-              <a:spcAft>
-                <a:spcPts val="0"/>
-              </a:spcAft>
-              <a:buNone/>
-            </a:pPr>
-            <a:r>
-              <a:rPr lang="en-US"/>
-              <a:t>Last lecture we hit the wall with files-as-storage and listed five specific problems. Today: how databases solve all five. The cool part is that a SQLite database is also just a file sitting on disk, and everything that makes it different lives in the layout inside that file plus a few protocols around it.</a:t>
-            </a:r>
-            <a:endParaRPr/>
-          </a:p>
+          <a:p/>
         </p:txBody>
       </p:sp>
       <p:sp>
@@ -1005,20 +990,9 @@
           </a:bodyPr>
           <a:lstStyle/>
           <a:p>
-            <a:pPr marL="0" lvl="0" indent="0" algn="l" rtl="0">
-              <a:spcBef>
-                <a:spcPts val="0"/>
-              </a:spcBef>
-              <a:spcAft>
-                <a:spcPts val="0"/>
-              </a:spcAft>
-              <a:buNone/>
-            </a:pPr>
-            <a:r>
-              <a:rPr lang="en-US"/>
-              <a:t>sqlite_master is a real table you can SELECT from - worth trying on their chat.db at the end if there's time. And the schema isn't off in some separate config file, it's data living inside the same database as everything else. Self-describing systems are a big deal in computer science and this is a nice small one to point at.</a:t>
-            </a:r>
-            <a:endParaRPr/>
+            <a:r>
+              <a:t>If time at the end: SELECT from sqlite_master on their chat.db.</a:t>
+            </a:r>
           </a:p>
         </p:txBody>
       </p:sp>
@@ -1163,20 +1137,9 @@
           </a:bodyPr>
           <a:lstStyle/>
           <a:p>
-            <a:pPr marL="0" lvl="0" indent="0" algn="l" rtl="0">
-              <a:spcBef>
-                <a:spcPts val="0"/>
-              </a:spcBef>
-              <a:spcAft>
-                <a:spcPts val="0"/>
-              </a:spcAft>
-              <a:buNone/>
-            </a:pPr>
-            <a:r>
-              <a:rPr lang="en-US"/>
-              <a:t>The journal is the answer to 'what about the bytes that were already written before the crash?' - SQLite kept the old version, so it can undo. ACID = Atomicity, Consistency, Isolation, Durability. We're only really hitting atomicity here; the rest get a sentence at most. Modern SQLite uses WAL by default, but the rollback journal is easier to explain and the principle is the same.</a:t>
-            </a:r>
-            <a:endParaRPr/>
+            <a:r>
+              <a:t>ACID: Atomicity, Consistency, Isolation, Durability; only atomicity today. Modern default is WAL.</a:t>
+            </a:r>
           </a:p>
         </p:txBody>
       </p:sp>
@@ -1321,20 +1284,9 @@
           </a:bodyPr>
           <a:lstStyle/>
           <a:p>
-            <a:pPr marL="0" lvl="0" indent="0" algn="l" rtl="0">
-              <a:spcBef>
-                <a:spcPts val="0"/>
-              </a:spcBef>
-              <a:spcAft>
-                <a:spcPts val="0"/>
-              </a:spcAft>
-              <a:buNone/>
-            </a:pPr>
-            <a:r>
-              <a:rPr lang="en-US"/>
-              <a:t>The cool bit here is that SQLite didn't invent concurrency control at all - it leans on file locks, a primitive that's been sitting in Unix since the 1980s. The cleverness is all in the composition.</a:t>
-            </a:r>
-            <a:endParaRPr/>
+            <a:r>
+              <a:t>File locks are a Unix primitive from the 1980s; SQLite only composes them.</a:t>
+            </a:r>
           </a:p>
         </p:txBody>
       </p:sp>
@@ -1479,20 +1431,9 @@
           </a:bodyPr>
           <a:lstStyle/>
           <a:p>
-            <a:pPr marL="0" lvl="0" indent="0" algn="l" rtl="0">
-              <a:spcBef>
-                <a:spcPts val="0"/>
-              </a:spcBef>
-              <a:spcAft>
-                <a:spcPts val="0"/>
-              </a:spcAft>
-              <a:buNone/>
-            </a:pPr>
-            <a:r>
-              <a:rPr lang="en-US"/>
-              <a:t>This is the one I actually care about them feeling, so slow down here. What they should walk out with is that a database is a stack of small understandable engineering tricks piled on top of the same files we were using last week, with no magic anywhere in it.</a:t>
-            </a:r>
-            <a:endParaRPr/>
+            <a:r>
+              <a:t>Slow down here.</a:t>
+            </a:r>
           </a:p>
         </p:txBody>
       </p:sp>
@@ -1636,22 +1577,7 @@
             <a:noAutofit/>
           </a:bodyPr>
           <a:lstStyle/>
-          <a:p>
-            <a:pPr marL="0" lvl="0" indent="0" algn="l" rtl="0">
-              <a:spcBef>
-                <a:spcPts val="0"/>
-              </a:spcBef>
-              <a:spcAft>
-                <a:spcPts val="0"/>
-              </a:spcAft>
-              <a:buNone/>
-            </a:pPr>
-            <a:r>
-              <a:rPr lang="en-US"/>
-              <a:t>Now that they know what's inside, time to learn the interface. The next ~12 slides are the practical CRUD content from the original version of this lecture - they were good, just needed a better setup.</a:t>
-            </a:r>
-            <a:endParaRPr/>
-          </a:p>
+          <a:p/>
         </p:txBody>
       </p:sp>
       <p:sp>
@@ -1795,20 +1721,9 @@
           </a:bodyPr>
           <a:lstStyle/>
           <a:p>
-            <a:pPr marL="0" lvl="0" indent="0" algn="l" rtl="0">
-              <a:spcBef>
-                <a:spcPts val="0"/>
-              </a:spcBef>
-              <a:spcAft>
-                <a:spcPts val="0"/>
-              </a:spcAft>
-              <a:buNone/>
-            </a:pPr>
-            <a:r>
-              <a:rPr lang="en-US"/>
-              <a:t>Quick tour of SQL so they recognize the syntax. These four operations (INSERT, SELECT, UPDATE, DELETE) are called CRUD: Create, Read, Update, Delete. We'll use all of them from Python on the next slides.</a:t>
-            </a:r>
-            <a:endParaRPr/>
+            <a:r>
+              <a:t>These four are CRUD: Create, Read, Update, Delete.</a:t>
+            </a:r>
           </a:p>
         </p:txBody>
       </p:sp>
@@ -1953,20 +1868,9 @@
           </a:bodyPr>
           <a:lstStyle/>
           <a:p>
-            <a:pPr marL="0" lvl="0" indent="0" algn="l" rtl="0">
-              <a:spcBef>
-                <a:spcPts val="0"/>
-              </a:spcBef>
-              <a:spcAft>
-                <a:spcPts val="0"/>
-              </a:spcAft>
-              <a:buNone/>
-            </a:pPr>
-            <a:r>
-              <a:rPr lang="en-US"/>
-              <a:t>Declarative vs imperative is the conceptual leap here. Everything they've written up to now has been step-by-step instructions, and SQL flips that around so you describe what the answer looks like and the database goes and works out how to get it. Same idea underneath Excel formulas, Prolog, and a lot of the reactive UI stuff they'll meet in week 6.</a:t>
-            </a:r>
-            <a:endParaRPr/>
+            <a:r>
+              <a:t>Other declarative examples: Excel formulas, Prolog, reactive UI (week 6).</a:t>
+            </a:r>
           </a:p>
         </p:txBody>
       </p:sp>
@@ -2111,20 +2015,9 @@
           </a:bodyPr>
           <a:lstStyle/>
           <a:p>
-            <a:pPr marL="0" lvl="0" indent="0" algn="l" rtl="0">
-              <a:spcBef>
-                <a:spcPts val="0"/>
-              </a:spcBef>
-              <a:spcAft>
-                <a:spcPts val="0"/>
-              </a:spcAft>
-              <a:buNone/>
-            </a:pPr>
-            <a:r>
-              <a:rPr lang="en-US"/>
-              <a:t>Declarative vs imperative is the conceptual leap here. Everything they've written up to now has been step-by-step instructions, and SQL flips that around so you describe what the answer looks like and the database goes and works out how to get it. Same idea underneath Excel formulas, Prolog, and a lot of the reactive UI stuff they'll meet in week 6.</a:t>
-            </a:r>
-            <a:endParaRPr/>
+            <a:r>
+              <a:t>Other declarative examples: Excel formulas, Prolog, reactive UI (week 6).</a:t>
+            </a:r>
           </a:p>
         </p:txBody>
       </p:sp>
@@ -2269,20 +2162,9 @@
           </a:bodyPr>
           <a:lstStyle/>
           <a:p>
-            <a:pPr marL="0" lvl="0" indent="0" algn="l" rtl="0">
-              <a:spcBef>
-                <a:spcPts val="0"/>
-              </a:spcBef>
-              <a:spcAft>
-                <a:spcPts val="0"/>
-              </a:spcAft>
-              <a:buNone/>
-            </a:pPr>
-            <a:r>
-              <a:rPr lang="en-US"/>
-              <a:t>No engine, no connection pool, no library wrapper. The stdlib sqlite3 module is the SQLite C library with a thin Python skin on top. conn.execute() returns a cursor; iterate it or call .fetchone() / .fetchall(). The 'with' statement on a sqlite3 connection is a transaction context (commits on success, rolls back on exception) - it does NOT close the connection. Mention this only if asked; the explicit close pattern is fine for everything we'll do today.</a:t>
-            </a:r>
-            <a:endParaRPr/>
+            <a:r>
+              <a:t>If asked: `with` on a connection is a transaction, does not close it.</a:t>
+            </a:r>
           </a:p>
         </p:txBody>
       </p:sp>
@@ -2427,20 +2309,9 @@
           </a:bodyPr>
           <a:lstStyle/>
           <a:p>
-            <a:pPr marL="0" lvl="0" indent="0" algn="l" rtl="0">
-              <a:spcBef>
-                <a:spcPts val="0"/>
-              </a:spcBef>
-              <a:spcAft>
-                <a:spcPts val="0"/>
-              </a:spcAft>
-              <a:buNone/>
-            </a:pPr>
-            <a:r>
-              <a:rPr lang="en-US"/>
-              <a:t>IF NOT EXISTS prevents errors if the table already exists. The constraints (NOT NULL, AUTOINCREMENT) get stored in sqlite_master and enforced on every write. conn.commit() saves the change - without it, nothing persists. Like git: nothing is real until you commit.</a:t>
-            </a:r>
-            <a:endParaRPr/>
+            <a:r>
+              <a:t>Without commit nothing persists; same as git.</a:t>
+            </a:r>
           </a:p>
         </p:txBody>
       </p:sp>
@@ -2584,22 +2455,7 @@
             <a:noAutofit/>
           </a:bodyPr>
           <a:lstStyle/>
-          <a:p>
-            <a:pPr marL="0" lvl="0" indent="0" algn="l" rtl="0">
-              <a:spcBef>
-                <a:spcPts val="0"/>
-              </a:spcBef>
-              <a:spcAft>
-                <a:spcPts val="0"/>
-              </a:spcAft>
-              <a:buNone/>
-            </a:pPr>
-            <a:r>
-              <a:rPr lang="en-US"/>
-              <a:t>Anchor everything against last lecture. The five problems were the punchline of 2.1; today we actually answer the question they posed. Lean into the puzzle: if a SQLite DB is also just a file, how does it fix any of these? The student should be a little confused at this point.</a:t>
-            </a:r>
-            <a:endParaRPr/>
-          </a:p>
+          <a:p/>
         </p:txBody>
       </p:sp>
       <p:sp>
@@ -2743,20 +2599,9 @@
           </a:bodyPr>
           <a:lstStyle/>
           <a:p>
-            <a:pPr marL="0" lvl="0" indent="0" algn="l" rtl="0">
-              <a:spcBef>
-                <a:spcPts val="0"/>
-              </a:spcBef>
-              <a:spcAft>
-                <a:spcPts val="0"/>
-              </a:spcAft>
-              <a:buNone/>
-            </a:pPr>
-            <a:r>
-              <a:rPr lang="en-US"/>
-              <a:t>The ? placeholder is a 'bound parameter'. Values are passed in a tuple - one value per ? in order. sqlite3 (actually the underlying C library) safely escapes them. We don't specify id or timestamp - the database fills those in from the schema defaults.</a:t>
-            </a:r>
-            <a:endParaRPr/>
+            <a:r>
+              <a:t>id and timestamp come from schema defaults.</a:t>
+            </a:r>
           </a:p>
         </p:txBody>
       </p:sp>
@@ -2901,20 +2746,9 @@
           </a:bodyPr>
           <a:lstStyle/>
           <a:p>
-            <a:pPr marL="0" lvl="0" indent="0" algn="l" rtl="0">
-              <a:spcBef>
-                <a:spcPts val="0"/>
-              </a:spcBef>
-              <a:spcAft>
-                <a:spcPts val="0"/>
-              </a:spcAft>
-              <a:buNone/>
-            </a:pPr>
-            <a:r>
-              <a:rPr lang="en-US"/>
-              <a:t>The ? placeholder is a 'bound parameter'. Values are passed in a tuple - one value per ? in order. sqlite3 (actually the underlying C library) safely escapes them. We don't specify id or timestamp - the database fills those in from the schema defaults.</a:t>
-            </a:r>
-            <a:endParaRPr/>
+            <a:r>
+              <a:t>id and timestamp come from schema defaults.</a:t>
+            </a:r>
           </a:p>
         </p:txBody>
       </p:sp>
@@ -3058,22 +2892,7 @@
             <a:noAutofit/>
           </a:bodyPr>
           <a:lstStyle/>
-          <a:p>
-            <a:pPr marL="0" lvl="0" indent="0" algn="l" rtl="0">
-              <a:spcBef>
-                <a:spcPts val="0"/>
-              </a:spcBef>
-              <a:spcAft>
-                <a:spcPts val="0"/>
-              </a:spcAft>
-              <a:buNone/>
-            </a:pPr>
-            <a:r>
-              <a:rPr lang="en-US"/>
-              <a:t>Students need: id INTEGER PRIMARY KEY AUTOINCREMENT, username TEXT NOT NULL, email TEXT. Then an INSERT with ? placeholders and a tuple.</a:t>
-            </a:r>
-            <a:endParaRPr/>
-          </a:p>
+          <a:p/>
         </p:txBody>
       </p:sp>
       <p:sp>
@@ -3217,20 +3036,9 @@
           </a:bodyPr>
           <a:lstStyle/>
           <a:p>
-            <a:pPr marL="0" lvl="0" indent="0" algn="l" rtl="0">
-              <a:spcBef>
-                <a:spcPts val="0"/>
-              </a:spcBef>
-              <a:spcAft>
-                <a:spcPts val="0"/>
-              </a:spcAft>
-              <a:buNone/>
-            </a:pPr>
-            <a:r>
-              <a:rPr lang="en-US"/>
-              <a:t>email doesn't need NOT NULL - it's optional. The pattern is always: 'SQL with ? placeholders', (tuple, of, values). Two commits: one for the schema change, one for the data.</a:t>
-            </a:r>
-            <a:endParaRPr/>
+            <a:r>
+              <a:t>email is optional, no NOT NULL. Two commits: schema, then data.</a:t>
+            </a:r>
           </a:p>
         </p:txBody>
       </p:sp>
@@ -3375,20 +3183,9 @@
           </a:bodyPr>
           <a:lstStyle/>
           <a:p>
-            <a:pPr marL="0" lvl="0" indent="0" algn="l" rtl="0">
-              <a:spcBef>
-                <a:spcPts val="0"/>
-              </a:spcBef>
-              <a:spcAft>
-                <a:spcPts val="0"/>
-              </a:spcAft>
-              <a:buNone/>
-            </a:pPr>
-            <a:r>
-              <a:rPr lang="en-US"/>
-              <a:t>By default sqlite3 returns rows as plain tuples - row[0], row[1]. Setting conn.row_factory = sqlite3.Row gives you dict-like access (row['username']) and is almost always what you want. The result of execute() is iterable - looping is the same as fetchall() but doesn't load everything into memory at once. fetchone() returns None if there are no rows.</a:t>
-            </a:r>
-            <a:endParaRPr/>
+            <a:r>
+              <a:t>Iterating the cursor streams rows; fetchall loads everything. fetchone returns None if empty.</a:t>
+            </a:r>
           </a:p>
         </p:txBody>
       </p:sp>
@@ -3533,20 +3330,9 @@
           </a:bodyPr>
           <a:lstStyle/>
           <a:p>
-            <a:pPr marL="0" lvl="0" indent="0" algn="l" rtl="0">
-              <a:spcBef>
-                <a:spcPts val="0"/>
-              </a:spcBef>
-              <a:spcAft>
-                <a:spcPts val="0"/>
-              </a:spcAft>
-              <a:buNone/>
-            </a:pPr>
-            <a:r>
-              <a:rPr lang="en-US"/>
-              <a:t>The trailing comma on ('alice',) is a real gotcha - without it, Python sees a parenthesized string, not a tuple, and sqlite3 raises an error. WHERE filters rows, ORDER BY sorts (DESC = newest first), LIMIT caps the count. For COUNT/SUM/MAX queries, fetchone()[0] is the idiom to get the single scalar value. The DB uses indexes automatically when they exist - you don't ask for it.</a:t>
-            </a:r>
-            <a:endParaRPr/>
+            <a:r>
+              <a:t>Trailing comma: without it Python passes a string, sqlite3 errors.</a:t>
+            </a:r>
           </a:p>
         </p:txBody>
       </p:sp>
@@ -3691,20 +3477,9 @@
           </a:bodyPr>
           <a:lstStyle/>
           <a:p>
-            <a:pPr marL="0" lvl="0" indent="0" algn="l" rtl="0">
-              <a:spcBef>
-                <a:spcPts val="0"/>
-              </a:spcBef>
-              <a:spcAft>
-                <a:spcPts val="0"/>
-              </a:spcAft>
-              <a:buNone/>
-            </a:pPr>
-            <a:r>
-              <a:rPr lang="en-US"/>
-              <a:t>Students need: (1) SELECT with WHERE username = ?, ('alice',) - remind them about the trailing comma. (2) SELECT with ORDER BY timestamp DESC LIMIT 5. (3) SELECT COUNT(*) with WHERE.</a:t>
-            </a:r>
-            <a:endParaRPr/>
+            <a:r>
+              <a:t>Remind: trailing comma on ('alice',).</a:t>
+            </a:r>
           </a:p>
         </p:txBody>
       </p:sp>
@@ -3849,20 +3624,9 @@
           </a:bodyPr>
           <a:lstStyle/>
           <a:p>
-            <a:pPr marL="0" lvl="0" indent="0" algn="l" rtl="0">
-              <a:spcBef>
-                <a:spcPts val="0"/>
-              </a:spcBef>
-              <a:spcAft>
-                <a:spcPts val="0"/>
-              </a:spcAft>
-              <a:buNone/>
-            </a:pPr>
-            <a:r>
-              <a:rPr lang="en-US"/>
-              <a:t>Two patterns to hold onto: plain 'SQL' when there are no parameters, and 'SQL with ?' plus a (tuple,) when there are. And .fetchone()[0] is the idiom when you want a single scalar back - COUNT, SUM, MAX.</a:t>
-            </a:r>
-            <a:endParaRPr/>
+            <a:r>
+              <a:t>`.fetchone()[0]` is the idiom for any scalar: COUNT, SUM, MAX.</a:t>
+            </a:r>
           </a:p>
         </p:txBody>
       </p:sp>
@@ -4006,22 +3770,7 @@
             <a:noAutofit/>
           </a:bodyPr>
           <a:lstStyle/>
-          <a:p>
-            <a:pPr marL="0" lvl="0" indent="0" algn="l" rtl="0">
-              <a:spcBef>
-                <a:spcPts val="0"/>
-              </a:spcBef>
-              <a:spcAft>
-                <a:spcPts val="0"/>
-              </a:spcAft>
-              <a:buNone/>
-            </a:pPr>
-            <a:r>
-              <a:rPr lang="en-US"/>
-              <a:t>UPDATE and DELETE both need WHERE clauses. Without WHERE, UPDATE changes every row and DELETE empties the table. This is the most common SQL mistake - always double-check your WHERE.</a:t>
-            </a:r>
-            <a:endParaRPr/>
-          </a:p>
+          <a:p/>
         </p:txBody>
       </p:sp>
       <p:sp>
@@ -4165,20 +3914,9 @@
           </a:bodyPr>
           <a:lstStyle/>
           <a:p>
-            <a:pPr marL="0" lvl="0" indent="0" algn="l" rtl="0">
-              <a:spcBef>
-                <a:spcPts val="0"/>
-              </a:spcBef>
-              <a:spcAft>
-                <a:spcPts val="0"/>
-              </a:spcAft>
-              <a:buNone/>
-            </a:pPr>
-            <a:r>
-              <a:rPr lang="en-US"/>
-              <a:t>SQL injection is one of the most common web vulnerabilities out there and it's been on the OWASP Top 10 essentially forever. The fix is boring: never put user input into a SQL string, use :param placeholders and hand the values over in a dict. And it's ALL SQL, not only the SELECTs.</a:t>
-            </a:r>
-            <a:endParaRPr/>
+            <a:r>
+              <a:t>OWASP Top 10 for years. Applies to INSERT/UPDATE/DELETE too. Placeholder varies: ? sqlite3, %s psycopg.</a:t>
+            </a:r>
           </a:p>
         </p:txBody>
       </p:sp>
@@ -4323,20 +4061,9 @@
           </a:bodyPr>
           <a:lstStyle/>
           <a:p>
-            <a:pPr marL="0" lvl="0" indent="0" algn="l" rtl="0">
-              <a:spcBef>
-                <a:spcPts val="0"/>
-              </a:spcBef>
-              <a:spcAft>
-                <a:spcPts val="0"/>
-              </a:spcAft>
-              <a:buNone/>
-            </a:pPr>
-            <a:r>
-              <a:rPr lang="en-US"/>
-              <a:t>If anyone guesses 'special structure inside the file,' they're exactly right.</a:t>
-            </a:r>
-            <a:endParaRPr/>
+            <a:r>
+              <a:t>Take guesses; 'special structure inside the file' is right.</a:t>
+            </a:r>
           </a:p>
         </p:txBody>
       </p:sp>
@@ -4481,20 +4208,9 @@
           </a:bodyPr>
           <a:lstStyle/>
           <a:p>
-            <a:pPr marL="0" lvl="0" indent="0" algn="l" rtl="0">
-              <a:spcBef>
-                <a:spcPts val="0"/>
-              </a:spcBef>
-              <a:spcAft>
-                <a:spcPts val="0"/>
-              </a:spcAft>
-              <a:buNone/>
-            </a:pPr>
-            <a:r>
-              <a:rPr lang="en-US"/>
-              <a:t>SQL injection is one of the most common web vulnerabilities out there and it's been on the OWASP Top 10 essentially forever. The fix is boring: never put user input into a SQL string, use :param placeholders and hand the values over in a dict. And it's ALL SQL, not only the SELECTs.</a:t>
-            </a:r>
-            <a:endParaRPr/>
+            <a:r>
+              <a:t>OWASP Top 10 for years. Applies to INSERT/UPDATE/DELETE too. Placeholder varies: ? sqlite3, %s psycopg.</a:t>
+            </a:r>
           </a:p>
         </p:txBody>
       </p:sp>
@@ -4639,20 +4355,9 @@
           </a:bodyPr>
           <a:lstStyle/>
           <a:p>
-            <a:pPr marL="0" lvl="0" indent="0" algn="l" rtl="0">
-              <a:spcBef>
-                <a:spcPts val="0"/>
-              </a:spcBef>
-              <a:spcAft>
-                <a:spcPts val="0"/>
-              </a:spcAft>
-              <a:buNone/>
-            </a:pPr>
-            <a:r>
-              <a:rPr lang="en-US"/>
-              <a:t>SQL injection is one of the most common web vulnerabilities out there and it's been on the OWASP Top 10 essentially forever. The fix is boring: never put user input into a SQL string, use :param placeholders and hand the values over in a dict. And it's ALL SQL, not only the SELECTs.</a:t>
-            </a:r>
-            <a:endParaRPr/>
+            <a:r>
+              <a:t>OWASP Top 10 for years. Applies to INSERT/UPDATE/DELETE too. Placeholder varies: ? sqlite3, %s psycopg.</a:t>
+            </a:r>
           </a:p>
         </p:txBody>
       </p:sp>
@@ -4797,20 +4502,9 @@
           </a:bodyPr>
           <a:lstStyle/>
           <a:p>
-            <a:pPr marL="0" lvl="0" indent="0" algn="l" rtl="0">
-              <a:spcBef>
-                <a:spcPts val="0"/>
-              </a:spcBef>
-              <a:spcAft>
-                <a:spcPts val="0"/>
-              </a:spcAft>
-              <a:buNone/>
-            </a:pPr>
-            <a:r>
-              <a:rPr lang="en-US"/>
-              <a:t>SQL injection is one of the most common web vulnerabilities out there and it's been on the OWASP Top 10 essentially forever. The fix is boring: never put user input into a SQL string, use ? placeholders and hand the values over in a tuple. And it's ALL SQL, not only the SELECTs. Same rule in every language and every driver too - the placeholder syntax moves around (? in sqlite3, %s in psycopg, :name in cx_Oracle) but the principle doesn't.</a:t>
-            </a:r>
-            <a:endParaRPr/>
+            <a:r>
+              <a:t>OWASP Top 10 for years. Applies to INSERT/UPDATE/DELETE too. Placeholder varies: ? sqlite3, %s psycopg.</a:t>
+            </a:r>
           </a:p>
         </p:txBody>
       </p:sp>
@@ -4955,20 +4649,9 @@
           </a:bodyPr>
           <a:lstStyle/>
           <a:p>
-            <a:pPr marL="0" lvl="0" indent="0" algn="l" rtl="0">
-              <a:spcBef>
-                <a:spcPts val="0"/>
-              </a:spcBef>
-              <a:spcAft>
-                <a:spcPts val="0"/>
-              </a:spcAft>
-              <a:buNone/>
-            </a:pPr>
-            <a:r>
-              <a:rPr lang="en-US"/>
-              <a:t>Design-judgment section. The full normalization theory (1NF/2NF/3NF) gets its own lecture later on, so today is just the three shapes a table can take plus some intuition about when you'd reach for each one. The question slide is the hook, so let them sit with it a second.</a:t>
-            </a:r>
-            <a:endParaRPr/>
+            <a:r>
+              <a:t>1NF/2NF/3NF is a later lecture; today just the three shapes.</a:t>
+            </a:r>
           </a:p>
         </p:txBody>
       </p:sp>
@@ -5113,20 +4796,9 @@
           </a:bodyPr>
           <a:lstStyle/>
           <a:p>
-            <a:pPr marL="0" lvl="0" indent="0" algn="l" rtl="0">
-              <a:spcBef>
-                <a:spcPts val="0"/>
-              </a:spcBef>
-              <a:spcAft>
-                <a:spcPts val="0"/>
-              </a:spcAft>
-              <a:buNone/>
-            </a:pPr>
-            <a:r>
-              <a:rPr lang="en-US"/>
-              <a:t>Let them propose. Most will go straight to a wide table. Push: what if you need to add a new setting next week? What if half the settings are blank for most users? Then walk through the three options.</a:t>
-            </a:r>
-            <a:endParaRPr/>
+            <a:r>
+              <a:t>Let them propose; expect wide table. Ask: new setting next week? Half blank?</a:t>
+            </a:r>
           </a:p>
         </p:txBody>
       </p:sp>
@@ -5271,20 +4943,9 @@
           </a:bodyPr>
           <a:lstStyle/>
           <a:p>
-            <a:pPr marL="0" lvl="0" indent="0" algn="l" rtl="0">
-              <a:spcBef>
-                <a:spcPts val="0"/>
-              </a:spcBef>
-              <a:spcAft>
-                <a:spcPts val="0"/>
-              </a:spcAft>
-              <a:buNone/>
-            </a:pPr>
-            <a:r>
-              <a:rPr lang="en-US"/>
-              <a:t>Pros: fast reads, fixed shape, one row per user, easy to reason about. Cons: rigid - every new setting needs an ALTER TABLE. Wasteful if half the columns are NULL for most users. Columns can balloon to hundreds in real apps. Also: column order in CREATE TABLE matters less than you'd think - the DB stores them in pages efficiently regardless.</a:t>
-            </a:r>
-            <a:endParaRPr/>
+            <a:r>
+              <a:t>Pros: fast reads, fixed shape. Cons: ALTER per new setting, NULL-heavy, columns balloon.</a:t>
+            </a:r>
           </a:p>
         </p:txBody>
       </p:sp>
@@ -5429,20 +5090,9 @@
           </a:bodyPr>
           <a:lstStyle/>
           <a:p>
-            <a:pPr marL="0" lvl="0" indent="0" algn="l" rtl="0">
-              <a:spcBef>
-                <a:spcPts val="0"/>
-              </a:spcBef>
-              <a:spcAft>
-                <a:spcPts val="0"/>
-              </a:spcAft>
-              <a:buNone/>
-            </a:pPr>
-            <a:r>
-              <a:rPr lang="en-US"/>
-              <a:t>EAV = Entity-Attribute-Value. Pros: infinitely flexible, sparse-friendly (you only store the props a user actually has), no schema migrations to add a new prop. Cons: everything is TEXT - you lose types. Querying gets ugly (multiple self-joins to reconstruct one user's settings as a row). Constraints are hard to enforce. Indexes help less because the prop column is itself a value.</a:t>
-            </a:r>
-            <a:endParaRPr/>
+            <a:r>
+              <a:t>EAV = Entity-Attribute-Value. Cons: all TEXT, self-joins to rebuild a row, weak constraints.</a:t>
+            </a:r>
           </a:p>
         </p:txBody>
       </p:sp>
@@ -5587,20 +5237,9 @@
           </a:bodyPr>
           <a:lstStyle/>
           <a:p>
-            <a:pPr marL="0" lvl="0" indent="0" algn="l" rtl="0">
-              <a:spcBef>
-                <a:spcPts val="0"/>
-              </a:spcBef>
-              <a:spcAft>
-                <a:spcPts val="0"/>
-              </a:spcAft>
-              <a:buNone/>
-            </a:pPr>
-            <a:r>
-              <a:rPr lang="en-US"/>
-              <a:t>The default relational answer. Each table has a single, well-defined purpose. The foreign key (REFERENCES users(id)) enforces that every row in user_settings points at a real user. JOIN reconstructs the whole picture at query time. This is what 'normalization' means at the intuition level - one fact in one place. Full theory comes later in the course.</a:t>
-            </a:r>
-            <a:endParaRPr/>
+            <a:r>
+              <a:t>Normalization at intuition level: one fact in one place. Foreign key enforces real user.</a:t>
+            </a:r>
           </a:p>
         </p:txBody>
       </p:sp>
@@ -5745,20 +5384,9 @@
           </a:bodyPr>
           <a:lstStyle/>
           <a:p>
-            <a:pPr marL="0" lvl="0" indent="0" algn="l" rtl="0">
-              <a:spcBef>
-                <a:spcPts val="0"/>
-              </a:spcBef>
-              <a:spcAft>
-                <a:spcPts val="0"/>
-              </a:spcAft>
-              <a:buNone/>
-            </a:pPr>
-            <a:r>
-              <a:rPr lang="en-US"/>
-              <a:t>This is judgment rather than rules, and the right answer moves around depending on access patterns, growth, and how often the schema has to change. What I mostly want out of the section is that they learn the question exists at all - most of them have never been asked to design a table, they've only ever used tables somebody else already made.</a:t>
-            </a:r>
-            <a:endParaRPr/>
+            <a:r>
+              <a:t>Point: the design question exists at all; access patterns and schema churn decide.</a:t>
+            </a:r>
           </a:p>
         </p:txBody>
       </p:sp>
@@ -5903,20 +5531,9 @@
           </a:bodyPr>
           <a:lstStyle/>
           <a:p>
-            <a:pPr marL="0" lvl="0" indent="0" algn="l" rtl="0">
-              <a:spcBef>
-                <a:spcPts val="0"/>
-              </a:spcBef>
-              <a:spcAft>
-                <a:spcPts val="0"/>
-              </a:spcAft>
-              <a:buNone/>
-            </a:pPr>
-            <a:r>
-              <a:rPr lang="en-US"/>
-              <a:t>This is judgment rather than rules, and the right answer moves around depending on access patterns, growth, and how often the schema has to change. What I mostly want out of the section is that they learn the question exists at all - most of them have never been asked to design a table, they've only ever used tables somebody else already made.</a:t>
-            </a:r>
-            <a:endParaRPr/>
+            <a:r>
+              <a:t>Point: the design question exists at all; access patterns and schema churn decide.</a:t>
+            </a:r>
           </a:p>
         </p:txBody>
       </p:sp>
@@ -6061,20 +5678,9 @@
           </a:bodyPr>
           <a:lstStyle/>
           <a:p>
-            <a:pPr marL="0" lvl="0" indent="0" algn="l" rtl="0">
-              <a:spcBef>
-                <a:spcPts val="0"/>
-              </a:spcBef>
-              <a:spcAft>
-                <a:spcPts val="0"/>
-              </a:spcAft>
-              <a:buNone/>
-            </a:pPr>
-            <a:r>
-              <a:rPr lang="en-US"/>
-              <a:t>The mechanism part. Goal is intuition, not mastery. Five short slides, one diagram, one recap. Don't go into WAL vs rollback journal or page header internals - hit the headline ideas and move on.</a:t>
-            </a:r>
-            <a:endParaRPr/>
+            <a:r>
+              <a:t>Intuition only; skip WAL vs rollback journal and page header internals.</a:t>
+            </a:r>
           </a:p>
         </p:txBody>
       </p:sp>
@@ -6219,20 +5825,9 @@
           </a:bodyPr>
           <a:lstStyle/>
           <a:p>
-            <a:pPr marL="0" lvl="0" indent="0" algn="l" rtl="0">
-              <a:spcBef>
-                <a:spcPts val="0"/>
-              </a:spcBef>
-              <a:spcAft>
-                <a:spcPts val="0"/>
-              </a:spcAft>
-              <a:buNone/>
-            </a:pPr>
-            <a:r>
-              <a:rPr lang="en-US"/>
-              <a:t>This is judgment rather than rules, and the right answer moves around depending on access patterns, growth, and how often the schema has to change. What I mostly want out of the section is that they learn the question exists at all - most of them have never been asked to design a table, they've only ever used tables somebody else already made.</a:t>
-            </a:r>
-            <a:endParaRPr/>
+            <a:r>
+              <a:t>Point: the design question exists at all; access patterns and schema churn decide.</a:t>
+            </a:r>
           </a:p>
         </p:txBody>
       </p:sp>
@@ -6376,22 +5971,7 @@
             <a:noAutofit/>
           </a:bodyPr>
           <a:lstStyle/>
-          <a:p>
-            <a:pPr marL="0" lvl="0" indent="0" algn="l" rtl="0">
-              <a:spcBef>
-                <a:spcPts val="0"/>
-              </a:spcBef>
-              <a:spcAft>
-                <a:spcPts val="0"/>
-              </a:spcAft>
-              <a:buNone/>
-            </a:pPr>
-            <a:r>
-              <a:rPr lang="en-US"/>
-              <a:t>Putting it all together. Short section - mostly review.</a:t>
-            </a:r>
-            <a:endParaRPr/>
-          </a:p>
+          <a:p/>
         </p:txBody>
       </p:sp>
       <p:sp>
@@ -6535,20 +6115,9 @@
           </a:bodyPr>
           <a:lstStyle/>
           <a:p>
-            <a:pPr marL="0" lvl="0" indent="0" algn="l" rtl="0">
-              <a:spcBef>
-                <a:spcPts val="0"/>
-              </a:spcBef>
-              <a:spcAft>
-                <a:spcPts val="0"/>
-              </a:spcAft>
-              <a:buNone/>
-            </a:pPr>
-            <a:r>
-              <a:rPr lang="en-US"/>
-              <a:t>The data layer for the chat app. Two new things: contextlib.closing() wraps the connection so the 'with' block actually closes it on exit (remember: 'with' on a sqlite3 conn alone is just a transaction). Setting row_factory = sqlite3.Row gives the caller dict-like access to columns. Next lecture we'll expose these functions through a REST API. The pattern is always: connect, execute, commit (for writes), return (for reads).</a:t>
-            </a:r>
-            <a:endParaRPr/>
+            <a:r>
+              <a:t>`closing()` actually closes; bare `with` is only a transaction. REST API over these next lecture.</a:t>
+            </a:r>
           </a:p>
         </p:txBody>
       </p:sp>
@@ -6693,20 +6262,9 @@
           </a:bodyPr>
           <a:lstStyle/>
           <a:p>
-            <a:pPr marL="0" lvl="0" indent="0" algn="l" rtl="0">
-              <a:spcBef>
-                <a:spcPts val="0"/>
-              </a:spcBef>
-              <a:spcAft>
-                <a:spcPts val="0"/>
-              </a:spcAft>
-              <a:buNone/>
-            </a:pPr>
-            <a:r>
-              <a:rPr lang="en-US"/>
-              <a:t>DB Browser for SQLite is free and lets you view tables, run queries, and inspect data visually. Open chat.db with it after class - they'll see sqlite_master sitting right there in the table list.</a:t>
-            </a:r>
-            <a:endParaRPr/>
+            <a:r>
+              <a:t>Open chat.db in DB Browser after class; sqlite_master shows in the table list.</a:t>
+            </a:r>
           </a:p>
         </p:txBody>
       </p:sp>
@@ -6851,20 +6409,9 @@
           </a:bodyPr>
           <a:lstStyle/>
           <a:p>
-            <a:pPr marL="0" lvl="0" indent="0" algn="l" rtl="0">
-              <a:spcBef>
-                <a:spcPts val="0"/>
-              </a:spcBef>
-              <a:spcAft>
-                <a:spcPts val="0"/>
-              </a:spcAft>
-              <a:buNone/>
-            </a:pPr>
-            <a:r>
-              <a:rPr lang="en-US"/>
-              <a:t>CRUD = Create, read, update, delete, actually maps to insert, select, update, delete above.</a:t>
-            </a:r>
-            <a:endParaRPr/>
+            <a:r>
+              <a:t>CRUD = Create, Read, Update, Delete; Create/Read are INSERT/SELECT.</a:t>
+            </a:r>
           </a:p>
         </p:txBody>
       </p:sp>
@@ -7009,20 +6556,9 @@
           </a:bodyPr>
           <a:lstStyle/>
           <a:p>
-            <a:pPr marL="0" lvl="0" indent="0" algn="l" rtl="0">
-              <a:spcBef>
-                <a:spcPts val="0"/>
-              </a:spcBef>
-              <a:spcAft>
-                <a:spcPts val="0"/>
-              </a:spcAft>
-              <a:buNone/>
-            </a:pPr>
-            <a:r>
-              <a:rPr lang="en-US"/>
-              <a:t>The first cool thing. Pages are how the DB escapes the read-modify-write trap from last lecture. 4KB matches the OS disk block size - not a coincidence; it lets the DB align reads/writes with what the disk does natively. You can mention this if a student asks why 4KB.</a:t>
-            </a:r>
-            <a:endParaRPr/>
+            <a:r>
+              <a:t>If asked why 4 KB: matches the OS disk block size.</a:t>
+            </a:r>
           </a:p>
         </p:txBody>
       </p:sp>
@@ -7166,22 +6702,7 @@
             <a:noAutofit/>
           </a:bodyPr>
           <a:lstStyle/>
-          <a:p>
-            <a:pPr marL="0" lvl="0" indent="0" algn="l" rtl="0">
-              <a:spcBef>
-                <a:spcPts val="0"/>
-              </a:spcBef>
-              <a:spcAft>
-                <a:spcPts val="0"/>
-              </a:spcAft>
-              <a:buNone/>
-            </a:pPr>
-            <a:r>
-              <a:rPr lang="en-US"/>
-              <a:t>The number is what should stick - 20 hops against a million reads, which is the difference between instant and your server sitting there while somebody refreshes. Picture on the next slide.</a:t>
-            </a:r>
-            <a:endParaRPr/>
-          </a:p>
+          <a:p/>
         </p:txBody>
       </p:sp>
       <p:sp>
@@ -7633,20 +7154,9 @@
           </a:bodyPr>
           <a:lstStyle/>
           <a:p>
-            <a:pPr marL="0" lvl="0" indent="0" algn="l" rtl="0">
-              <a:spcBef>
-                <a:spcPts val="0"/>
-              </a:spcBef>
-              <a:spcAft>
-                <a:spcPts val="0"/>
-              </a:spcAft>
-              <a:buNone/>
-            </a:pPr>
-            <a:r>
-              <a:rPr lang="en-US"/>
-              <a:t>Walk through one lookup. Pick id=600,000. Root sees the range, sends you to the middle internal node (334k-666k). That node sends you to the leaf for 501k-666k. Three hops, found the row. Highlighted in orange. Without the index, you'd read every page until you stumbled on the right one. Don't draw this on the board - the slide does it.</a:t>
-            </a:r>
-            <a:endParaRPr/>
+            <a:r>
+              <a:t>Walk id=600,000: root, middle internal, leaf 501k-666k. Don't draw on board.</a:t>
+            </a:r>
           </a:p>
         </p:txBody>
       </p:sp>
